--- a/curso_es/pptx/S47.pptx
+++ b/curso_es/pptx/S47.pptx
@@ -3799,7 +3799,7 @@
                 </a:solidFill>
                 <a:latin typeface="Nunito Sans"/>
               </a:rPr>
-              <a:t>Iker: «El examen de mañana me lo sé. Lo he leído una vez y lo entiendo todo».</a:t>
+              <a:t>Un chico: «El examen de mañana me lo sé. Lo he leído una vez y lo entiendo todo».</a:t>
             </a:r>
           </a:p>
         </p:txBody>
@@ -4417,7 +4417,7 @@
                 </a:solidFill>
                 <a:latin typeface="Nunito Sans"/>
               </a:rPr>
-              <a:t>Chen: «El trabajo lo hago el domingo por la tarde, en dos horas». Siempre dice lo mismo, y siempre acaba de noche.</a:t>
+              <a:t>Un chico: «El trabajo lo hago el domingo por la tarde, en dos horas». Siempre dice lo mismo, y siempre acaba de noche.</a:t>
             </a:r>
           </a:p>
         </p:txBody>
@@ -4465,7 +4465,7 @@
                 </a:solidFill>
                 <a:latin typeface="Nunito Sans"/>
               </a:rPr>
-              <a:t>Chen planea como si todo fuera a salir perfecto.</a:t>
+              <a:t>Ese chico planea como si todo fuera a salir perfecto.</a:t>
             </a:r>
           </a:p>
           <a:p>
@@ -4726,7 +4726,7 @@
                 </a:solidFill>
                 <a:latin typeface="Nunito Sans"/>
               </a:rPr>
-              <a:t>Aitor es portero federado desde hace tres años. Dice: «En los penaltis del recreo paro más que nadie de la clase». Lo demuestra cada semana.</a:t>
+              <a:t>Un chico es portero federado desde hace tres años. Dice: «En los penaltis del recreo paro más que nadie de la clase». Lo demuestra cada semana.</a:t>
             </a:r>
           </a:p>
         </p:txBody>
@@ -6434,7 +6434,7 @@
                 </a:solidFill>
                 <a:latin typeface="Nunito Sans"/>
               </a:rPr>
-              <a:t>Iker: «El examen de mañana me lo sé. Lo he leído una vez y lo entiendo todo».</a:t>
+              <a:t>Un chico: «El examen de mañana me lo sé. Lo he leído una vez y lo entiendo todo».</a:t>
             </a:r>
           </a:p>
         </p:txBody>
